--- a/feature-slice/06-conversational-qa/conversational-qa.pptx
+++ b/feature-slice/06-conversational-qa/conversational-qa.pptx
@@ -203,7 +203,7 @@
           <a:p>
             <a:fld id="{1CFE36D4-B224-4D49-A73E-0BF1A210728E}" type="datetimeFigureOut">
               <a:rPr lang="ko-KR" altLang="en-US" smtClean="0"/>
-              <a:t>2026. 4. 13.</a:t>
+              <a:t>2026. 4. 16.</a:t>
             </a:fld>
             <a:endParaRPr lang="ko-KR" altLang="en-US"/>
           </a:p>
@@ -368,7 +368,7 @@
           <a:p>
             <a:fld id="{79F7304B-F283-4E41-A8FA-EB923FFBA2A0}" type="datetimeFigureOut">
               <a:rPr lang="ko-KR" altLang="en-US" smtClean="0"/>
-              <a:t>2026. 4. 13.</a:t>
+              <a:t>2026. 4. 16.</a:t>
             </a:fld>
             <a:endParaRPr lang="ko-KR" altLang="en-US"/>
           </a:p>
@@ -1459,7 +1459,7 @@
             <a:fld id="{A08F8EB2-BEDB-4375-BAD0-E61FA200F7A6}" type="datetimeFigureOut">
               <a:rPr lang="ko-KR" altLang="en-US" smtClean="0"/>
               <a:pPr/>
-              <a:t>2026. 4. 13.</a:t>
+              <a:t>2026. 4. 16.</a:t>
             </a:fld>
             <a:endParaRPr lang="ko-KR" altLang="en-US"/>
           </a:p>
@@ -1793,8 +1793,8 @@
         </p:nvSpPr>
         <p:spPr>
           <a:xfrm>
-            <a:off x="1120209" y="2095390"/>
-            <a:ext cx="3153259" cy="2100034"/>
+            <a:off x="790384" y="1592120"/>
+            <a:ext cx="3153259" cy="2128462"/>
           </a:xfrm>
           <a:prstGeom prst="rect">
             <a:avLst/>
@@ -1857,7 +1857,7 @@
         </p:nvSpPr>
         <p:spPr>
           <a:xfrm>
-            <a:off x="2115011" y="1165602"/>
+            <a:off x="1794487" y="811694"/>
             <a:ext cx="1325880" cy="566928"/>
           </a:xfrm>
           <a:prstGeom prst="roundRect">
@@ -2020,7 +2020,7 @@
         </p:nvSpPr>
         <p:spPr>
           <a:xfrm>
-            <a:off x="2115011" y="2566565"/>
+            <a:off x="1785186" y="2063295"/>
             <a:ext cx="1166417" cy="566928"/>
           </a:xfrm>
           <a:prstGeom prst="rect">
@@ -2156,7 +2156,7 @@
         </p:nvSpPr>
         <p:spPr>
           <a:xfrm>
-            <a:off x="3199894" y="3455470"/>
+            <a:off x="2870069" y="2952200"/>
             <a:ext cx="903808" cy="566928"/>
           </a:xfrm>
           <a:prstGeom prst="rect">
@@ -2238,103 +2238,6 @@
                 <a:latin typeface="+mn-ea"/>
               </a:rPr>
               <a:t>접근 제어</a:t>
-            </a:r>
-            <a:endParaRPr dirty="0">
-              <a:latin typeface="+mn-ea"/>
-            </a:endParaRPr>
-          </a:p>
-        </p:txBody>
-      </p:sp>
-      <p:sp>
-        <p:nvSpPr>
-          <p:cNvPr id="6" name="Rectangle 9">
-            <a:extLst>
-              <a:ext uri="{FF2B5EF4-FFF2-40B4-BE49-F238E27FC236}">
-                <a16:creationId xmlns:a16="http://schemas.microsoft.com/office/drawing/2014/main" id="{9CD5BE9C-2ECC-F3E1-3CA1-6858CBFC975D}"/>
-              </a:ext>
-            </a:extLst>
-          </p:cNvPr>
-          <p:cNvSpPr/>
-          <p:nvPr/>
-        </p:nvSpPr>
-        <p:spPr>
-          <a:xfrm>
-            <a:off x="4432686" y="1486117"/>
-            <a:ext cx="1596763" cy="566928"/>
-          </a:xfrm>
-          <a:prstGeom prst="rect">
-            <a:avLst/>
-          </a:prstGeom>
-          <a:solidFill>
-            <a:srgbClr val="438DD5"/>
-          </a:solidFill>
-          <a:ln w="12700">
-            <a:solidFill>
-              <a:srgbClr val="438DD5"/>
-            </a:solidFill>
-          </a:ln>
-          <a:effectLst/>
-        </p:spPr>
-        <p:style>
-          <a:lnRef idx="1">
-            <a:schemeClr val="accent1"/>
-          </a:lnRef>
-          <a:fillRef idx="3">
-            <a:schemeClr val="accent1"/>
-          </a:fillRef>
-          <a:effectRef idx="2">
-            <a:schemeClr val="accent1"/>
-          </a:effectRef>
-          <a:fontRef idx="minor">
-            <a:schemeClr val="lt1"/>
-          </a:fontRef>
-        </p:style>
-        <p:txBody>
-          <a:bodyPr wrap="square" lIns="45720" tIns="18288" rIns="45720" bIns="18288" rtlCol="0" anchor="ctr"/>
-          <a:lstStyle/>
-          <a:p>
-            <a:pPr algn="ctr">
-              <a:defRPr sz="750" b="1">
-                <a:solidFill>
-                  <a:srgbClr val="FFFFFF"/>
-                </a:solidFill>
-              </a:defRPr>
-            </a:pPr>
-            <a:r>
-              <a:rPr lang="en-US" dirty="0">
-                <a:latin typeface="+mn-ea"/>
-              </a:rPr>
-              <a:t>Feedback Gateway</a:t>
-            </a:r>
-            <a:endParaRPr dirty="0">
-              <a:latin typeface="+mn-ea"/>
-            </a:endParaRPr>
-          </a:p>
-          <a:p>
-            <a:pPr algn="ctr">
-              <a:defRPr sz="750" b="0">
-                <a:solidFill>
-                  <a:srgbClr val="FFFFFF"/>
-                </a:solidFill>
-              </a:defRPr>
-            </a:pPr>
-            <a:r>
-              <a:rPr lang="ko-KR" altLang="en-US" dirty="0">
-                <a:latin typeface="+mn-ea"/>
-              </a:rPr>
-              <a:t>답변 평가</a:t>
-            </a:r>
-            <a:r>
-              <a:rPr lang="en-US" altLang="ko-KR" dirty="0">
-                <a:latin typeface="+mn-ea"/>
-              </a:rPr>
-              <a:t>·</a:t>
-            </a:r>
-            <a:r>
-              <a:rPr lang="ko-KR" altLang="en-US" dirty="0">
-                <a:latin typeface="+mn-ea"/>
-              </a:rPr>
-              <a:t>자산화 요청 중계</a:t>
             </a:r>
             <a:endParaRPr dirty="0">
               <a:latin typeface="+mn-ea"/>
@@ -2360,7 +2263,7 @@
         </p:nvCxnSpPr>
         <p:spPr>
           <a:xfrm rot="16200000" flipH="1">
-            <a:off x="3014021" y="2817692"/>
+            <a:off x="2684196" y="2314422"/>
             <a:ext cx="321977" cy="953578"/>
           </a:xfrm>
           <a:prstGeom prst="bentConnector3">
@@ -2406,8 +2309,8 @@
         </p:nvSpPr>
         <p:spPr>
           <a:xfrm>
-            <a:off x="4366165" y="1193799"/>
-            <a:ext cx="5974033" cy="3001625"/>
+            <a:off x="4024479" y="839891"/>
+            <a:ext cx="5510646" cy="2880691"/>
           </a:xfrm>
           <a:prstGeom prst="rect">
             <a:avLst/>
@@ -2470,7 +2373,7 @@
         </p:nvSpPr>
         <p:spPr>
           <a:xfrm>
-            <a:off x="6740029" y="1470340"/>
+            <a:off x="6229005" y="1116432"/>
             <a:ext cx="1166417" cy="566928"/>
           </a:xfrm>
           <a:prstGeom prst="rect">
@@ -2585,7 +2488,7 @@
         </p:nvSpPr>
         <p:spPr>
           <a:xfrm>
-            <a:off x="8341474" y="1964509"/>
+            <a:off x="7830450" y="1610601"/>
             <a:ext cx="1425244" cy="566928"/>
           </a:xfrm>
           <a:prstGeom prst="rect">
@@ -2706,7 +2609,7 @@
         </p:nvSpPr>
         <p:spPr>
           <a:xfrm>
-            <a:off x="8341474" y="2891143"/>
+            <a:off x="7830450" y="2435631"/>
             <a:ext cx="1425244" cy="566928"/>
           </a:xfrm>
           <a:prstGeom prst="rect">
@@ -2815,7 +2718,7 @@
         </p:nvSpPr>
         <p:spPr>
           <a:xfrm>
-            <a:off x="6380223" y="3506617"/>
+            <a:off x="5869199" y="3059572"/>
             <a:ext cx="1425244" cy="566928"/>
           </a:xfrm>
           <a:prstGeom prst="rect">
@@ -2918,7 +2821,7 @@
         </p:nvSpPr>
         <p:spPr>
           <a:xfrm>
-            <a:off x="4790740" y="3485246"/>
+            <a:off x="4280720" y="3060692"/>
             <a:ext cx="1425244" cy="566928"/>
           </a:xfrm>
           <a:prstGeom prst="rect">
@@ -3045,7 +2948,7 @@
         </p:nvGrpSpPr>
         <p:grpSpPr>
           <a:xfrm>
-            <a:off x="9641526" y="4285222"/>
+            <a:off x="9665847" y="3769814"/>
             <a:ext cx="1783080" cy="1005840"/>
             <a:chOff x="4237345" y="4954856"/>
             <a:chExt cx="1783080" cy="1005840"/>
@@ -3224,8 +3127,8 @@
         </p:nvSpPr>
         <p:spPr>
           <a:xfrm>
-            <a:off x="3512324" y="4288569"/>
-            <a:ext cx="5616388" cy="1941331"/>
+            <a:off x="4021314" y="3769814"/>
+            <a:ext cx="5510646" cy="1697873"/>
           </a:xfrm>
           <a:prstGeom prst="rect">
             <a:avLst/>
@@ -3288,7 +3191,7 @@
         </p:nvSpPr>
         <p:spPr>
           <a:xfrm>
-            <a:off x="7478642" y="5540334"/>
+            <a:off x="7970902" y="4826843"/>
             <a:ext cx="1417320" cy="530352"/>
           </a:xfrm>
           <a:prstGeom prst="can">
@@ -3433,7 +3336,7 @@
         </p:nvSpPr>
         <p:spPr>
           <a:xfrm>
-            <a:off x="5607896" y="5540334"/>
+            <a:off x="6100156" y="4826843"/>
             <a:ext cx="1691640" cy="530352"/>
           </a:xfrm>
           <a:prstGeom prst="can">
@@ -3566,7 +3469,7 @@
         </p:nvSpPr>
         <p:spPr>
           <a:xfrm>
-            <a:off x="3691430" y="5540334"/>
+            <a:off x="4183690" y="4826843"/>
             <a:ext cx="1737360" cy="530352"/>
           </a:xfrm>
           <a:prstGeom prst="can">
@@ -3645,7 +3548,7 @@
         </p:nvSpPr>
         <p:spPr>
           <a:xfrm>
-            <a:off x="5607896" y="4548298"/>
+            <a:off x="6100156" y="4029543"/>
             <a:ext cx="1425244" cy="566928"/>
           </a:xfrm>
           <a:prstGeom prst="rect">
@@ -3766,7 +3669,7 @@
         </p:nvSpPr>
         <p:spPr>
           <a:xfrm>
-            <a:off x="1289355" y="3455470"/>
+            <a:off x="959530" y="2952200"/>
             <a:ext cx="1507270" cy="566928"/>
           </a:xfrm>
           <a:prstGeom prst="rect">
@@ -3854,14 +3757,12 @@
           <p:nvPr/>
         </p:nvCxnSpPr>
         <p:spPr>
-          <a:xfrm rot="5400000">
-            <a:off x="4287656" y="4324628"/>
-            <a:ext cx="1488160" cy="943252"/>
-          </a:xfrm>
-          <a:prstGeom prst="bentConnector3">
-            <a:avLst>
-              <a:gd name="adj1" fmla="val 22566"/>
-            </a:avLst>
+          <a:xfrm>
+            <a:off x="4993342" y="3627620"/>
+            <a:ext cx="0" cy="1199223"/>
+          </a:xfrm>
+          <a:prstGeom prst="straightConnector1">
+            <a:avLst/>
           </a:prstGeom>
           <a:ln w="3175">
             <a:solidFill>
@@ -3904,13 +3805,13 @@
         </p:nvCxnSpPr>
         <p:spPr>
           <a:xfrm rot="5400000" flipH="1" flipV="1">
-            <a:off x="3290021" y="2521679"/>
-            <a:ext cx="253688" cy="2747750"/>
+            <a:off x="2909456" y="2147864"/>
+            <a:ext cx="174972" cy="2567555"/>
           </a:xfrm>
           <a:prstGeom prst="bentConnector4">
             <a:avLst>
-              <a:gd name="adj1" fmla="val -90111"/>
-              <a:gd name="adj2" fmla="val 82818"/>
+              <a:gd name="adj1" fmla="val -130649"/>
+              <a:gd name="adj2" fmla="val 88418"/>
             </a:avLst>
           </a:prstGeom>
           <a:ln w="3175">
@@ -3953,7 +3854,7 @@
         </p:nvCxnSpPr>
         <p:spPr>
           <a:xfrm rot="5400000">
-            <a:off x="1499366" y="2234384"/>
+            <a:off x="1169541" y="1731114"/>
             <a:ext cx="1231290" cy="12700"/>
           </a:xfrm>
           <a:prstGeom prst="bentConnector4">
@@ -3996,20 +3897,19 @@
           </p:cNvPr>
           <p:cNvCxnSpPr>
             <a:cxnSpLocks/>
-            <a:stCxn id="4" idx="0"/>
             <a:endCxn id="3" idx="3"/>
           </p:cNvCxnSpPr>
           <p:nvPr/>
         </p:nvCxnSpPr>
         <p:spPr>
           <a:xfrm rot="5400000" flipH="1" flipV="1">
-            <a:off x="2510806" y="1636481"/>
-            <a:ext cx="1117499" cy="742671"/>
+            <a:off x="2481390" y="1559022"/>
+            <a:ext cx="1102841" cy="175114"/>
           </a:xfrm>
           <a:prstGeom prst="bentConnector4">
             <a:avLst>
-              <a:gd name="adj1" fmla="val 7011"/>
-              <a:gd name="adj2" fmla="val 130781"/>
+              <a:gd name="adj1" fmla="val -1545"/>
+              <a:gd name="adj2" fmla="val 230544"/>
             </a:avLst>
           </a:prstGeom>
           <a:ln w="3175">
@@ -4052,13 +3952,13 @@
         </p:nvCxnSpPr>
         <p:spPr>
           <a:xfrm rot="5400000">
-            <a:off x="466658" y="2084230"/>
-            <a:ext cx="2477401" cy="832006"/>
+            <a:off x="217142" y="1661268"/>
+            <a:ext cx="2316785" cy="832007"/>
           </a:xfrm>
           <a:prstGeom prst="bentConnector4">
             <a:avLst>
-              <a:gd name="adj1" fmla="val -149"/>
-              <a:gd name="adj2" fmla="val 161057"/>
+              <a:gd name="adj1" fmla="val 861"/>
+              <a:gd name="adj2" fmla="val 145793"/>
             </a:avLst>
           </a:prstGeom>
           <a:ln w="3175">
@@ -4100,12 +4000,12 @@
         </p:nvCxnSpPr>
         <p:spPr>
           <a:xfrm flipV="1">
-            <a:off x="3281428" y="1618739"/>
-            <a:ext cx="3458601" cy="1096108"/>
+            <a:off x="2945253" y="1264831"/>
+            <a:ext cx="3277402" cy="1081928"/>
           </a:xfrm>
           <a:prstGeom prst="bentConnector3">
             <a:avLst>
-              <a:gd name="adj1" fmla="val 22582"/>
+              <a:gd name="adj1" fmla="val 45583"/>
             </a:avLst>
           </a:prstGeom>
           <a:ln w="3175">
@@ -4142,18 +4042,18 @@
           </p:cNvPr>
           <p:cNvCxnSpPr>
             <a:cxnSpLocks/>
-            <a:stCxn id="9" idx="1"/>
-            <a:endCxn id="4" idx="3"/>
           </p:cNvCxnSpPr>
           <p:nvPr/>
         </p:nvCxnSpPr>
         <p:spPr>
           <a:xfrm rot="10800000" flipV="1">
-            <a:off x="3281429" y="1753803"/>
-            <a:ext cx="3458601" cy="1096225"/>
+            <a:off x="2951603" y="1415128"/>
+            <a:ext cx="3277404" cy="1061120"/>
           </a:xfrm>
           <a:prstGeom prst="bentConnector3">
-            <a:avLst/>
+            <a:avLst>
+              <a:gd name="adj1" fmla="val 50000"/>
+            </a:avLst>
           </a:prstGeom>
           <a:ln w="3175">
             <a:solidFill>
@@ -4196,7 +4096,7 @@
         </p:nvCxnSpPr>
         <p:spPr>
           <a:xfrm>
-            <a:off x="7906446" y="1753804"/>
+            <a:off x="7395422" y="1399896"/>
             <a:ext cx="1147650" cy="210705"/>
           </a:xfrm>
           <a:prstGeom prst="bentConnector2">
@@ -4243,8 +4143,8 @@
         </p:nvCxnSpPr>
         <p:spPr>
           <a:xfrm>
-            <a:off x="9054096" y="2531437"/>
-            <a:ext cx="0" cy="359706"/>
+            <a:off x="8543072" y="2177529"/>
+            <a:ext cx="0" cy="258102"/>
           </a:xfrm>
           <a:prstGeom prst="straightConnector1">
             <a:avLst/>
@@ -4284,18 +4184,17 @@
           <p:cNvCxnSpPr>
             <a:cxnSpLocks/>
             <a:stCxn id="11" idx="3"/>
-            <a:endCxn id="16" idx="3"/>
           </p:cNvCxnSpPr>
           <p:nvPr/>
         </p:nvCxnSpPr>
         <p:spPr>
           <a:xfrm>
-            <a:off x="9766718" y="3174607"/>
-            <a:ext cx="1310416" cy="1723263"/>
+            <a:off x="9255694" y="2719095"/>
+            <a:ext cx="1644981" cy="1393882"/>
           </a:xfrm>
           <a:prstGeom prst="bentConnector3">
             <a:avLst>
-              <a:gd name="adj1" fmla="val 116153"/>
+              <a:gd name="adj1" fmla="val 99956"/>
             </a:avLst>
           </a:prstGeom>
           <a:ln w="3175">
@@ -4332,17 +4231,18 @@
           </p:cNvPr>
           <p:cNvCxnSpPr>
             <a:cxnSpLocks/>
-            <a:stCxn id="16" idx="1"/>
           </p:cNvCxnSpPr>
           <p:nvPr/>
         </p:nvCxnSpPr>
         <p:spPr>
-          <a:xfrm rot="10800000">
-            <a:off x="9431868" y="3485246"/>
-            <a:ext cx="547987" cy="1412624"/>
-          </a:xfrm>
-          <a:prstGeom prst="bentConnector2">
-            <a:avLst/>
+          <a:xfrm rot="16200000" flipV="1">
+            <a:off x="9100656" y="3002068"/>
+            <a:ext cx="1264465" cy="957353"/>
+          </a:xfrm>
+          <a:prstGeom prst="bentConnector3">
+            <a:avLst>
+              <a:gd name="adj1" fmla="val 99917"/>
+            </a:avLst>
           </a:prstGeom>
           <a:ln w="3175">
             <a:solidFill>
@@ -4384,7 +4284,7 @@
         </p:nvCxnSpPr>
         <p:spPr>
           <a:xfrm rot="10800000" flipV="1">
-            <a:off x="7092845" y="3330331"/>
+            <a:off x="6581821" y="2883286"/>
             <a:ext cx="1248628" cy="176286"/>
           </a:xfrm>
           <a:prstGeom prst="bentConnector2">
@@ -4431,8 +4331,8 @@
         </p:nvCxnSpPr>
         <p:spPr>
           <a:xfrm flipV="1">
-            <a:off x="7805467" y="3458071"/>
-            <a:ext cx="1248629" cy="332010"/>
+            <a:off x="7294443" y="3002559"/>
+            <a:ext cx="1248629" cy="340477"/>
           </a:xfrm>
           <a:prstGeom prst="bentConnector2">
             <a:avLst/>
@@ -4476,12 +4376,12 @@
         </p:nvCxnSpPr>
         <p:spPr>
           <a:xfrm rot="10800000" flipV="1">
-            <a:off x="5721840" y="3027406"/>
-            <a:ext cx="2619635" cy="463845"/>
+            <a:off x="5194122" y="2696357"/>
+            <a:ext cx="2636330" cy="356824"/>
           </a:xfrm>
           <a:prstGeom prst="bentConnector3">
             <a:avLst>
-              <a:gd name="adj1" fmla="val 100082"/>
+              <a:gd name="adj1" fmla="val 100008"/>
             </a:avLst>
           </a:prstGeom>
           <a:ln w="3175">
@@ -4524,7 +4424,7 @@
         </p:nvCxnSpPr>
         <p:spPr>
           <a:xfrm rot="5400000">
-            <a:off x="5357564" y="2110308"/>
+            <a:off x="4847544" y="1685754"/>
             <a:ext cx="1520737" cy="1229139"/>
           </a:xfrm>
           <a:prstGeom prst="bentConnector3">
@@ -4573,11 +4473,13 @@
         </p:nvCxnSpPr>
         <p:spPr>
           <a:xfrm rot="10800000" flipV="1">
-            <a:off x="4938672" y="4831761"/>
-            <a:ext cx="669225" cy="708571"/>
-          </a:xfrm>
-          <a:prstGeom prst="bentConnector2">
-            <a:avLst/>
+            <a:off x="5390700" y="4313007"/>
+            <a:ext cx="709457" cy="513836"/>
+          </a:xfrm>
+          <a:prstGeom prst="bentConnector3">
+            <a:avLst>
+              <a:gd name="adj1" fmla="val 100123"/>
+            </a:avLst>
           </a:prstGeom>
           <a:ln w="3175">
             <a:solidFill>
@@ -4619,8 +4521,8 @@
         </p:nvCxnSpPr>
         <p:spPr>
           <a:xfrm>
-            <a:off x="6320518" y="5115226"/>
-            <a:ext cx="0" cy="425107"/>
+            <a:off x="6812778" y="4596471"/>
+            <a:ext cx="0" cy="230372"/>
           </a:xfrm>
           <a:prstGeom prst="straightConnector1">
             <a:avLst/>
@@ -4665,8 +4567,8 @@
         </p:nvCxnSpPr>
         <p:spPr>
           <a:xfrm>
-            <a:off x="7031657" y="4993347"/>
-            <a:ext cx="1155645" cy="546987"/>
+            <a:off x="7523915" y="4434448"/>
+            <a:ext cx="1155647" cy="392395"/>
           </a:xfrm>
           <a:prstGeom prst="bentConnector2">
             <a:avLst/>
@@ -4711,13 +4613,13 @@
           <p:nvPr/>
         </p:nvCxnSpPr>
         <p:spPr>
-          <a:xfrm flipH="1">
-            <a:off x="7033140" y="3790081"/>
-            <a:ext cx="772327" cy="1041681"/>
+          <a:xfrm>
+            <a:off x="7294443" y="3343036"/>
+            <a:ext cx="230957" cy="969971"/>
           </a:xfrm>
           <a:prstGeom prst="bentConnector3">
             <a:avLst>
-              <a:gd name="adj1" fmla="val -29599"/>
+              <a:gd name="adj1" fmla="val 198979"/>
             </a:avLst>
           </a:prstGeom>
           <a:ln w="3175">
@@ -4754,19 +4656,16 @@
           </p:cNvPr>
           <p:cNvCxnSpPr>
             <a:cxnSpLocks/>
-            <a:endCxn id="12" idx="2"/>
           </p:cNvCxnSpPr>
           <p:nvPr/>
         </p:nvCxnSpPr>
         <p:spPr>
-          <a:xfrm rot="5400000" flipH="1" flipV="1">
-            <a:off x="6754037" y="4351163"/>
-            <a:ext cx="616426" cy="61190"/>
-          </a:xfrm>
-          <a:prstGeom prst="bentConnector3">
-            <a:avLst>
-              <a:gd name="adj1" fmla="val 227"/>
-            </a:avLst>
+          <a:xfrm flipH="1" flipV="1">
+            <a:off x="6188975" y="3605129"/>
+            <a:ext cx="1216" cy="420665"/>
+          </a:xfrm>
+          <a:prstGeom prst="straightConnector1">
+            <a:avLst/>
           </a:prstGeom>
           <a:ln w="3175">
             <a:solidFill>
@@ -4853,7 +4752,7 @@
         </p:nvSpPr>
         <p:spPr>
           <a:xfrm>
-            <a:off x="765023" y="1046087"/>
+            <a:off x="523927" y="715576"/>
             <a:ext cx="1343638" cy="215444"/>
           </a:xfrm>
           <a:prstGeom prst="rect">
@@ -4897,7 +4796,7 @@
         </p:nvSpPr>
         <p:spPr>
           <a:xfrm>
-            <a:off x="1308940" y="1283830"/>
+            <a:off x="1019902" y="1121976"/>
             <a:ext cx="837089" cy="338554"/>
           </a:xfrm>
           <a:prstGeom prst="rect">
@@ -4940,7 +4839,7 @@
         </p:nvSpPr>
         <p:spPr>
           <a:xfrm>
-            <a:off x="2760719" y="2276922"/>
+            <a:off x="3300891" y="1719662"/>
             <a:ext cx="734495" cy="215444"/>
           </a:xfrm>
           <a:prstGeom prst="rect">
@@ -4976,7 +4875,7 @@
         </p:nvSpPr>
         <p:spPr>
           <a:xfrm>
-            <a:off x="2743846" y="3136336"/>
+            <a:off x="2414021" y="2633066"/>
             <a:ext cx="877163" cy="215444"/>
           </a:xfrm>
           <a:prstGeom prst="rect">
@@ -5020,7 +4919,7 @@
         </p:nvSpPr>
         <p:spPr>
           <a:xfrm>
-            <a:off x="2422990" y="4026553"/>
+            <a:off x="2093165" y="3505138"/>
             <a:ext cx="1035861" cy="215444"/>
           </a:xfrm>
           <a:prstGeom prst="rect">
@@ -5064,7 +4963,7 @@
         </p:nvSpPr>
         <p:spPr>
           <a:xfrm>
-            <a:off x="3676299" y="2840990"/>
+            <a:off x="3355775" y="2494702"/>
             <a:ext cx="631903" cy="215444"/>
           </a:xfrm>
           <a:prstGeom prst="rect">
@@ -5100,7 +4999,7 @@
         </p:nvSpPr>
         <p:spPr>
           <a:xfrm>
-            <a:off x="5123320" y="1396494"/>
+            <a:off x="4793218" y="1043183"/>
             <a:ext cx="1013419" cy="215444"/>
           </a:xfrm>
           <a:prstGeom prst="rect">
@@ -5136,7 +5035,7 @@
         </p:nvSpPr>
         <p:spPr>
           <a:xfrm>
-            <a:off x="5505797" y="1965848"/>
+            <a:off x="4994773" y="1611940"/>
             <a:ext cx="1261884" cy="215444"/>
           </a:xfrm>
           <a:prstGeom prst="rect">
@@ -5180,7 +5079,7 @@
         </p:nvSpPr>
         <p:spPr>
           <a:xfrm>
-            <a:off x="7867728" y="1530125"/>
+            <a:off x="7356704" y="1176217"/>
             <a:ext cx="1277914" cy="215444"/>
           </a:xfrm>
           <a:prstGeom prst="rect">
@@ -5224,7 +5123,7 @@
         </p:nvSpPr>
         <p:spPr>
           <a:xfrm>
-            <a:off x="8971782" y="2585043"/>
+            <a:off x="8460758" y="2180333"/>
             <a:ext cx="1039067" cy="215444"/>
           </a:xfrm>
           <a:prstGeom prst="rect">
@@ -5264,7 +5163,7 @@
         </p:nvSpPr>
         <p:spPr>
           <a:xfrm>
-            <a:off x="6200300" y="2819411"/>
+            <a:off x="5689276" y="2473123"/>
             <a:ext cx="1152880" cy="215444"/>
           </a:xfrm>
           <a:prstGeom prst="rect">
@@ -5300,7 +5199,7 @@
         </p:nvSpPr>
         <p:spPr>
           <a:xfrm>
-            <a:off x="7038456" y="3118612"/>
+            <a:off x="6527432" y="2688502"/>
             <a:ext cx="1358065" cy="215444"/>
           </a:xfrm>
           <a:prstGeom prst="rect">
@@ -5336,7 +5235,7 @@
         </p:nvSpPr>
         <p:spPr>
           <a:xfrm>
-            <a:off x="9876811" y="2827806"/>
+            <a:off x="9499825" y="2386804"/>
             <a:ext cx="1225015" cy="338554"/>
           </a:xfrm>
           <a:prstGeom prst="rect">
@@ -5391,7 +5290,7 @@
         </p:nvSpPr>
         <p:spPr>
           <a:xfrm>
-            <a:off x="9412192" y="3858101"/>
+            <a:off x="9479542" y="2863748"/>
             <a:ext cx="734495" cy="215444"/>
           </a:xfrm>
           <a:prstGeom prst="rect">
@@ -5427,7 +5326,7 @@
         </p:nvSpPr>
         <p:spPr>
           <a:xfrm>
-            <a:off x="8008115" y="4357009"/>
+            <a:off x="7714464" y="3823418"/>
             <a:ext cx="1188146" cy="338554"/>
           </a:xfrm>
           <a:prstGeom prst="rect">
@@ -5495,7 +5394,7 @@
         </p:nvSpPr>
         <p:spPr>
           <a:xfrm>
-            <a:off x="7784055" y="3466893"/>
+            <a:off x="7264792" y="3011375"/>
             <a:ext cx="1181734" cy="338554"/>
           </a:xfrm>
           <a:prstGeom prst="rect">
@@ -5546,7 +5445,7 @@
         </p:nvSpPr>
         <p:spPr>
           <a:xfrm>
-            <a:off x="3646656" y="4707235"/>
+            <a:off x="4080389" y="4162824"/>
             <a:ext cx="1019830" cy="338554"/>
           </a:xfrm>
           <a:prstGeom prst="rect">
@@ -5597,7 +5496,7 @@
         </p:nvSpPr>
         <p:spPr>
           <a:xfrm>
-            <a:off x="4938670" y="4520692"/>
+            <a:off x="5388940" y="4311887"/>
             <a:ext cx="668773" cy="338554"/>
           </a:xfrm>
           <a:prstGeom prst="rect">
@@ -5640,7 +5539,7 @@
         </p:nvSpPr>
         <p:spPr>
           <a:xfrm>
-            <a:off x="7038456" y="4340285"/>
+            <a:off x="5395059" y="3777524"/>
             <a:ext cx="873957" cy="215444"/>
           </a:xfrm>
           <a:prstGeom prst="rect">
@@ -5676,7 +5575,7 @@
         </p:nvSpPr>
         <p:spPr>
           <a:xfrm>
-            <a:off x="6291829" y="5197566"/>
+            <a:off x="6784089" y="4600220"/>
             <a:ext cx="896399" cy="215444"/>
           </a:xfrm>
           <a:prstGeom prst="rect">
@@ -5720,7 +5619,7 @@
         </p:nvSpPr>
         <p:spPr>
           <a:xfrm>
-            <a:off x="8149584" y="5159118"/>
+            <a:off x="7783163" y="4451363"/>
             <a:ext cx="896399" cy="215444"/>
           </a:xfrm>
           <a:prstGeom prst="rect">
@@ -5746,6 +5645,89 @@
             <a:r>
               <a:rPr kumimoji="1" lang="ko-KR" altLang="en-US" sz="800" dirty="0"/>
               <a:t> 의존 조회</a:t>
+            </a:r>
+          </a:p>
+        </p:txBody>
+      </p:sp>
+      <p:sp>
+        <p:nvSpPr>
+          <p:cNvPr id="117" name="직사각형 116">
+            <a:extLst>
+              <a:ext uri="{FF2B5EF4-FFF2-40B4-BE49-F238E27FC236}">
+                <a16:creationId xmlns:a16="http://schemas.microsoft.com/office/drawing/2014/main" id="{B491A7EA-B1CF-AE8A-211C-D29CE7B23726}"/>
+              </a:ext>
+            </a:extLst>
+          </p:cNvPr>
+          <p:cNvSpPr/>
+          <p:nvPr/>
+        </p:nvSpPr>
+        <p:spPr>
+          <a:xfrm>
+            <a:off x="2251916" y="5540709"/>
+            <a:ext cx="7826268" cy="738664"/>
+          </a:xfrm>
+          <a:prstGeom prst="rect">
+            <a:avLst/>
+          </a:prstGeom>
+        </p:spPr>
+        <p:txBody>
+          <a:bodyPr wrap="square">
+            <a:spAutoFit/>
+          </a:bodyPr>
+          <a:lstStyle/>
+          <a:p>
+            <a:pPr algn="ctr"/>
+            <a:r>
+              <a:rPr lang="ko-KR" altLang="en-US" sz="1400" b="1" dirty="0"/>
+              <a:t>구조</a:t>
+            </a:r>
+            <a:r>
+              <a:rPr lang="en-US" altLang="ko-KR" sz="1400" b="1" dirty="0"/>
+              <a:t>,</a:t>
+            </a:r>
+            <a:r>
+              <a:rPr lang="ko-KR" altLang="en-US" sz="1400" b="1" dirty="0"/>
+              <a:t> 비즈니스 규칙</a:t>
+            </a:r>
+            <a:r>
+              <a:rPr lang="en-US" altLang="ko-KR" sz="1400" b="1" dirty="0"/>
+              <a:t>,</a:t>
+            </a:r>
+            <a:r>
+              <a:rPr lang="ko-KR" altLang="en-US" sz="1400" b="1" dirty="0"/>
+              <a:t> 영향 분석 산출물을 자연어 대화로 처리하는 질의응답 기능 제공</a:t>
+            </a:r>
+            <a:endParaRPr lang="en-US" altLang="ko-KR" sz="1400" b="1" dirty="0"/>
+          </a:p>
+          <a:p>
+            <a:pPr algn="ctr"/>
+            <a:r>
+              <a:rPr lang="en" altLang="ko-KR" sz="1400" b="1" dirty="0"/>
+              <a:t>RAG Hybrid Search</a:t>
+            </a:r>
+            <a:r>
+              <a:rPr lang="ko-KR" altLang="en-US" sz="1400" b="1" dirty="0"/>
+              <a:t>로 근거 링크가 포함된 답변 반환</a:t>
+            </a:r>
+            <a:endParaRPr lang="en-US" altLang="ko-KR" sz="1400" b="1" dirty="0"/>
+          </a:p>
+          <a:p>
+            <a:pPr algn="ctr"/>
+            <a:r>
+              <a:rPr lang="en" altLang="ko-KR" sz="1400" b="1" dirty="0"/>
+              <a:t>Feedback loop</a:t>
+            </a:r>
+            <a:r>
+              <a:rPr lang="ko-KR" altLang="en-US" sz="1400" b="1" dirty="0"/>
+              <a:t>로 검증된 답변을 </a:t>
+            </a:r>
+            <a:r>
+              <a:rPr lang="ko-KR" altLang="en-US" sz="1400" b="1" dirty="0" err="1"/>
+              <a:t>자산화하여</a:t>
+            </a:r>
+            <a:r>
+              <a:rPr lang="ko-KR" altLang="en-US" sz="1400" b="1" dirty="0"/>
+              <a:t> 재사용 가능하게 함</a:t>
             </a:r>
           </a:p>
         </p:txBody>
